--- a/poster/Hackyhour_poster.pptx
+++ b/poster/Hackyhour_poster.pptx
@@ -34,7 +34,7 @@
       </p:grpSpPr>
       <p:sp>
         <p:nvSpPr>
-          <p:cNvPr id="40" name="PlaceHolder 1"/>
+          <p:cNvPr id="41" name="PlaceHolder 1"/>
           <p:cNvSpPr>
             <a:spLocks noGrp="1"/>
           </p:cNvSpPr>
@@ -73,13 +73,7 @@
               <a:rPr b="0" lang="en-US" sz="4400" spc="-1" strike="noStrike">
                 <a:latin typeface="Arial"/>
               </a:rPr>
-              <a:t>move </a:t>
-            </a:r>
-            <a:r>
-              <a:rPr b="0" lang="en-US" sz="4400" spc="-1" strike="noStrike">
-                <a:latin typeface="Arial"/>
-              </a:rPr>
-              <a:t>the </a:t>
+              <a:t>move the </a:t>
             </a:r>
             <a:r>
               <a:rPr b="0" lang="en-US" sz="4400" spc="-1" strike="noStrike">
@@ -95,7 +89,7 @@
       </p:sp>
       <p:sp>
         <p:nvSpPr>
-          <p:cNvPr id="41" name="PlaceHolder 2"/>
+          <p:cNvPr id="42" name="PlaceHolder 2"/>
           <p:cNvSpPr>
             <a:spLocks noGrp="1"/>
           </p:cNvSpPr>
@@ -135,7 +129,7 @@
       </p:sp>
       <p:sp>
         <p:nvSpPr>
-          <p:cNvPr id="42" name="PlaceHolder 3"/>
+          <p:cNvPr id="43" name="PlaceHolder 3"/>
           <p:cNvSpPr>
             <a:spLocks noGrp="1"/>
           </p:cNvSpPr>
@@ -175,7 +169,7 @@
       </p:sp>
       <p:sp>
         <p:nvSpPr>
-          <p:cNvPr id="43" name="PlaceHolder 4"/>
+          <p:cNvPr id="44" name="PlaceHolder 4"/>
           <p:cNvSpPr>
             <a:spLocks noGrp="1"/>
           </p:cNvSpPr>
@@ -226,7 +220,7 @@
       </p:sp>
       <p:sp>
         <p:nvSpPr>
-          <p:cNvPr id="44" name="PlaceHolder 5"/>
+          <p:cNvPr id="45" name="PlaceHolder 5"/>
           <p:cNvSpPr>
             <a:spLocks noGrp="1"/>
           </p:cNvSpPr>
@@ -273,7 +267,7 @@
       </p:sp>
       <p:sp>
         <p:nvSpPr>
-          <p:cNvPr id="45" name="PlaceHolder 6"/>
+          <p:cNvPr id="46" name="PlaceHolder 6"/>
           <p:cNvSpPr>
             <a:spLocks noGrp="1"/>
           </p:cNvSpPr>
@@ -310,7 +304,7 @@
             <a:pPr algn="r">
               <a:buNone/>
             </a:pPr>
-            <a:fld id="{8428D78A-CAA5-47FC-A116-DA01D79879DB}" type="slidenum">
+            <a:fld id="{0FFA605D-A6F7-4434-858D-1CBF76CE8F63}" type="slidenum">
               <a:rPr b="0" lang="en-US" sz="1400" spc="-1" strike="noStrike">
                 <a:latin typeface="Times New Roman"/>
               </a:rPr>
@@ -347,7 +341,7 @@
       </p:grpSpPr>
       <p:sp>
         <p:nvSpPr>
-          <p:cNvPr id="81" name="PlaceHolder 1"/>
+          <p:cNvPr id="83" name="PlaceHolder 1"/>
           <p:cNvSpPr>
             <a:spLocks noGrp="1"/>
           </p:cNvSpPr>
@@ -358,19 +352,19 @@
         <p:spPr>
           <a:xfrm>
             <a:off x="2271600" y="1143000"/>
-            <a:ext cx="2313720" cy="3085560"/>
-          </a:xfrm>
-          <a:prstGeom prst="rect">
-            <a:avLst/>
-          </a:prstGeom>
-          <a:ln w="0">
-            <a:noFill/>
-          </a:ln>
-        </p:spPr>
-      </p:sp>
-      <p:sp>
-        <p:nvSpPr>
-          <p:cNvPr id="82" name="PlaceHolder 2"/>
+            <a:ext cx="2313360" cy="3085200"/>
+          </a:xfrm>
+          <a:prstGeom prst="rect">
+            <a:avLst/>
+          </a:prstGeom>
+          <a:ln w="0">
+            <a:noFill/>
+          </a:ln>
+        </p:spPr>
+      </p:sp>
+      <p:sp>
+        <p:nvSpPr>
+          <p:cNvPr id="84" name="PlaceHolder 2"/>
           <p:cNvSpPr>
             <a:spLocks noGrp="1"/>
           </p:cNvSpPr>
@@ -381,7 +375,7 @@
         <p:spPr>
           <a:xfrm>
             <a:off x="685800" y="4400640"/>
-            <a:ext cx="5485680" cy="3599640"/>
+            <a:ext cx="5485320" cy="3599280"/>
           </a:xfrm>
           <a:prstGeom prst="rect">
             <a:avLst/>
@@ -404,7 +398,7 @@
       </p:sp>
       <p:sp>
         <p:nvSpPr>
-          <p:cNvPr id="83" name="PlaceHolder 3"/>
+          <p:cNvPr id="85" name="PlaceHolder 3"/>
           <p:cNvSpPr>
             <a:spLocks noGrp="1"/>
           </p:cNvSpPr>
@@ -415,7 +409,7 @@
         <p:spPr>
           <a:xfrm>
             <a:off x="3884760" y="8685360"/>
-            <a:ext cx="2971080" cy="457920"/>
+            <a:ext cx="2970720" cy="457560"/>
           </a:xfrm>
           <a:prstGeom prst="rect">
             <a:avLst/>
@@ -447,7 +441,7 @@
               </a:lnSpc>
               <a:buNone/>
             </a:pPr>
-            <a:fld id="{D28FF6C7-6CFE-4889-887F-4E6D0EE7CA22}" type="slidenum">
+            <a:fld id="{CA133CC3-C8B3-410D-A790-11D3E524B508}" type="slidenum">
               <a:rPr b="0" lang="de-DE" sz="1200" spc="-1" strike="noStrike">
                 <a:latin typeface="Times New Roman"/>
               </a:rPr>
@@ -515,7 +509,7 @@
         <p:txBody>
           <a:bodyPr/>
           <a:p>
-            <a:fld id="{74A38518-09C4-4784-B081-0F3443BA248D}" type="slidenum">
+            <a:fld id="{ECC81F18-43A5-4037-872E-66EDE0FC1FC8}" type="slidenum">
               <a:t>&lt;#&gt;</a:t>
             </a:fld>
           </a:p>
@@ -566,7 +560,7 @@
       </p:grpSpPr>
       <p:sp>
         <p:nvSpPr>
-          <p:cNvPr id="25" name="PlaceHolder 1"/>
+          <p:cNvPr id="26" name="PlaceHolder 1"/>
           <p:cNvSpPr>
             <a:spLocks noGrp="1"/>
           </p:cNvSpPr>
@@ -577,7 +571,7 @@
         <p:spPr>
           <a:xfrm>
             <a:off x="720000" y="2095200"/>
-            <a:ext cx="8160480" cy="4456080"/>
+            <a:ext cx="8160120" cy="4455720"/>
           </a:xfrm>
           <a:prstGeom prst="rect">
             <a:avLst/>
@@ -603,7 +597,7 @@
       </p:sp>
       <p:sp>
         <p:nvSpPr>
-          <p:cNvPr id="26" name="PlaceHolder 2"/>
+          <p:cNvPr id="27" name="PlaceHolder 2"/>
           <p:cNvSpPr>
             <a:spLocks noGrp="1"/>
           </p:cNvSpPr>
@@ -614,7 +608,7 @@
         <p:spPr>
           <a:xfrm>
             <a:off x="479880" y="2995560"/>
-            <a:ext cx="8640720" cy="3541320"/>
+            <a:ext cx="8640360" cy="3540960"/>
           </a:xfrm>
           <a:prstGeom prst="rect">
             <a:avLst/>
@@ -637,7 +631,7 @@
       </p:sp>
       <p:sp>
         <p:nvSpPr>
-          <p:cNvPr id="27" name="PlaceHolder 3"/>
+          <p:cNvPr id="28" name="PlaceHolder 3"/>
           <p:cNvSpPr>
             <a:spLocks noGrp="1"/>
           </p:cNvSpPr>
@@ -647,8 +641,8 @@
         </p:nvSpPr>
         <p:spPr>
           <a:xfrm>
-            <a:off x="479880" y="6873840"/>
-            <a:ext cx="8640720" cy="3541320"/>
+            <a:off x="479880" y="6873480"/>
+            <a:ext cx="8640360" cy="3540960"/>
           </a:xfrm>
           <a:prstGeom prst="rect">
             <a:avLst/>
@@ -703,7 +697,7 @@
         <p:txBody>
           <a:bodyPr/>
           <a:p>
-            <a:fld id="{C4CB7F88-9F41-4186-A701-0E86A2E502E8}" type="slidenum">
+            <a:fld id="{27AC123C-1A99-4FB1-93CD-128305A1E98C}" type="slidenum">
               <a:t>&lt;#&gt;</a:t>
             </a:fld>
           </a:p>
@@ -754,7 +748,7 @@
       </p:grpSpPr>
       <p:sp>
         <p:nvSpPr>
-          <p:cNvPr id="28" name="PlaceHolder 1"/>
+          <p:cNvPr id="29" name="PlaceHolder 1"/>
           <p:cNvSpPr>
             <a:spLocks noGrp="1"/>
           </p:cNvSpPr>
@@ -765,7 +759,7 @@
         <p:spPr>
           <a:xfrm>
             <a:off x="720000" y="2095200"/>
-            <a:ext cx="8160480" cy="4456080"/>
+            <a:ext cx="8160120" cy="4455720"/>
           </a:xfrm>
           <a:prstGeom prst="rect">
             <a:avLst/>
@@ -791,7 +785,7 @@
       </p:sp>
       <p:sp>
         <p:nvSpPr>
-          <p:cNvPr id="29" name="PlaceHolder 2"/>
+          <p:cNvPr id="30" name="PlaceHolder 2"/>
           <p:cNvSpPr>
             <a:spLocks noGrp="1"/>
           </p:cNvSpPr>
@@ -802,7 +796,7 @@
         <p:spPr>
           <a:xfrm>
             <a:off x="479880" y="2995560"/>
-            <a:ext cx="4216320" cy="3541320"/>
+            <a:ext cx="4216320" cy="3540960"/>
           </a:xfrm>
           <a:prstGeom prst="rect">
             <a:avLst/>
@@ -825,7 +819,7 @@
       </p:sp>
       <p:sp>
         <p:nvSpPr>
-          <p:cNvPr id="30" name="PlaceHolder 3"/>
+          <p:cNvPr id="31" name="PlaceHolder 3"/>
           <p:cNvSpPr>
             <a:spLocks noGrp="1"/>
           </p:cNvSpPr>
@@ -836,7 +830,7 @@
         <p:spPr>
           <a:xfrm>
             <a:off x="4907520" y="2995560"/>
-            <a:ext cx="4216320" cy="3541320"/>
+            <a:ext cx="4216320" cy="3540960"/>
           </a:xfrm>
           <a:prstGeom prst="rect">
             <a:avLst/>
@@ -859,7 +853,7 @@
       </p:sp>
       <p:sp>
         <p:nvSpPr>
-          <p:cNvPr id="31" name="PlaceHolder 4"/>
+          <p:cNvPr id="32" name="PlaceHolder 4"/>
           <p:cNvSpPr>
             <a:spLocks noGrp="1"/>
           </p:cNvSpPr>
@@ -869,8 +863,8 @@
         </p:nvSpPr>
         <p:spPr>
           <a:xfrm>
-            <a:off x="479880" y="6873840"/>
-            <a:ext cx="4216320" cy="3541320"/>
+            <a:off x="479880" y="6873480"/>
+            <a:ext cx="4216320" cy="3540960"/>
           </a:xfrm>
           <a:prstGeom prst="rect">
             <a:avLst/>
@@ -893,7 +887,7 @@
       </p:sp>
       <p:sp>
         <p:nvSpPr>
-          <p:cNvPr id="32" name="PlaceHolder 5"/>
+          <p:cNvPr id="33" name="PlaceHolder 5"/>
           <p:cNvSpPr>
             <a:spLocks noGrp="1"/>
           </p:cNvSpPr>
@@ -903,8 +897,8 @@
         </p:nvSpPr>
         <p:spPr>
           <a:xfrm>
-            <a:off x="4907520" y="6873840"/>
-            <a:ext cx="4216320" cy="3541320"/>
+            <a:off x="4907520" y="6873480"/>
+            <a:ext cx="4216320" cy="3540960"/>
           </a:xfrm>
           <a:prstGeom prst="rect">
             <a:avLst/>
@@ -959,7 +953,7 @@
         <p:txBody>
           <a:bodyPr/>
           <a:p>
-            <a:fld id="{655725C7-6101-4726-A184-B0C8D38BB16E}" type="slidenum">
+            <a:fld id="{E266AAE2-56C1-43CA-BB30-AA8216A3AF60}" type="slidenum">
               <a:t>&lt;#&gt;</a:t>
             </a:fld>
           </a:p>
@@ -1010,7 +1004,7 @@
       </p:grpSpPr>
       <p:sp>
         <p:nvSpPr>
-          <p:cNvPr id="33" name="PlaceHolder 1"/>
+          <p:cNvPr id="34" name="PlaceHolder 1"/>
           <p:cNvSpPr>
             <a:spLocks noGrp="1"/>
           </p:cNvSpPr>
@@ -1021,7 +1015,7 @@
         <p:spPr>
           <a:xfrm>
             <a:off x="720000" y="2095200"/>
-            <a:ext cx="8160480" cy="4456080"/>
+            <a:ext cx="8160120" cy="4455720"/>
           </a:xfrm>
           <a:prstGeom prst="rect">
             <a:avLst/>
@@ -1047,7 +1041,7 @@
       </p:sp>
       <p:sp>
         <p:nvSpPr>
-          <p:cNvPr id="34" name="PlaceHolder 2"/>
+          <p:cNvPr id="35" name="PlaceHolder 2"/>
           <p:cNvSpPr>
             <a:spLocks noGrp="1"/>
           </p:cNvSpPr>
@@ -1058,7 +1052,7 @@
         <p:spPr>
           <a:xfrm>
             <a:off x="479880" y="2995560"/>
-            <a:ext cx="2782080" cy="3541320"/>
+            <a:ext cx="2782080" cy="3540960"/>
           </a:xfrm>
           <a:prstGeom prst="rect">
             <a:avLst/>
@@ -1081,7 +1075,7 @@
       </p:sp>
       <p:sp>
         <p:nvSpPr>
-          <p:cNvPr id="35" name="PlaceHolder 3"/>
+          <p:cNvPr id="36" name="PlaceHolder 3"/>
           <p:cNvSpPr>
             <a:spLocks noGrp="1"/>
           </p:cNvSpPr>
@@ -1092,7 +1086,7 @@
         <p:spPr>
           <a:xfrm>
             <a:off x="3401280" y="2995560"/>
-            <a:ext cx="2782080" cy="3541320"/>
+            <a:ext cx="2782080" cy="3540960"/>
           </a:xfrm>
           <a:prstGeom prst="rect">
             <a:avLst/>
@@ -1115,7 +1109,7 @@
       </p:sp>
       <p:sp>
         <p:nvSpPr>
-          <p:cNvPr id="36" name="PlaceHolder 4"/>
+          <p:cNvPr id="37" name="PlaceHolder 4"/>
           <p:cNvSpPr>
             <a:spLocks noGrp="1"/>
           </p:cNvSpPr>
@@ -1126,7 +1120,7 @@
         <p:spPr>
           <a:xfrm>
             <a:off x="6323040" y="2995560"/>
-            <a:ext cx="2782080" cy="3541320"/>
+            <a:ext cx="2782080" cy="3540960"/>
           </a:xfrm>
           <a:prstGeom prst="rect">
             <a:avLst/>
@@ -1149,7 +1143,7 @@
       </p:sp>
       <p:sp>
         <p:nvSpPr>
-          <p:cNvPr id="37" name="PlaceHolder 5"/>
+          <p:cNvPr id="38" name="PlaceHolder 5"/>
           <p:cNvSpPr>
             <a:spLocks noGrp="1"/>
           </p:cNvSpPr>
@@ -1159,8 +1153,8 @@
         </p:nvSpPr>
         <p:spPr>
           <a:xfrm>
-            <a:off x="479880" y="6873840"/>
-            <a:ext cx="2782080" cy="3541320"/>
+            <a:off x="479880" y="6873480"/>
+            <a:ext cx="2782080" cy="3540960"/>
           </a:xfrm>
           <a:prstGeom prst="rect">
             <a:avLst/>
@@ -1183,7 +1177,7 @@
       </p:sp>
       <p:sp>
         <p:nvSpPr>
-          <p:cNvPr id="38" name="PlaceHolder 6"/>
+          <p:cNvPr id="39" name="PlaceHolder 6"/>
           <p:cNvSpPr>
             <a:spLocks noGrp="1"/>
           </p:cNvSpPr>
@@ -1193,8 +1187,8 @@
         </p:nvSpPr>
         <p:spPr>
           <a:xfrm>
-            <a:off x="3401280" y="6873840"/>
-            <a:ext cx="2782080" cy="3541320"/>
+            <a:off x="3401280" y="6873480"/>
+            <a:ext cx="2782080" cy="3540960"/>
           </a:xfrm>
           <a:prstGeom prst="rect">
             <a:avLst/>
@@ -1217,7 +1211,7 @@
       </p:sp>
       <p:sp>
         <p:nvSpPr>
-          <p:cNvPr id="39" name="PlaceHolder 7"/>
+          <p:cNvPr id="40" name="PlaceHolder 7"/>
           <p:cNvSpPr>
             <a:spLocks noGrp="1"/>
           </p:cNvSpPr>
@@ -1227,8 +1221,8 @@
         </p:nvSpPr>
         <p:spPr>
           <a:xfrm>
-            <a:off x="6323040" y="6873840"/>
-            <a:ext cx="2782080" cy="3541320"/>
+            <a:off x="6323040" y="6873480"/>
+            <a:ext cx="2782080" cy="3540960"/>
           </a:xfrm>
           <a:prstGeom prst="rect">
             <a:avLst/>
@@ -1283,7 +1277,7 @@
         <p:txBody>
           <a:bodyPr/>
           <a:p>
-            <a:fld id="{449A62D1-047F-4992-9720-0F473E16059F}" type="slidenum">
+            <a:fld id="{CB44B6C4-8140-4E9D-9D50-F11232EA305D}" type="slidenum">
               <a:t>&lt;#&gt;</a:t>
             </a:fld>
           </a:p>
@@ -1334,7 +1328,7 @@
       </p:grpSpPr>
       <p:sp>
         <p:nvSpPr>
-          <p:cNvPr id="4" name="PlaceHolder 1"/>
+          <p:cNvPr id="5" name="PlaceHolder 1"/>
           <p:cNvSpPr>
             <a:spLocks noGrp="1"/>
           </p:cNvSpPr>
@@ -1345,7 +1339,7 @@
         <p:spPr>
           <a:xfrm>
             <a:off x="720000" y="2095200"/>
-            <a:ext cx="8160480" cy="4456080"/>
+            <a:ext cx="8160120" cy="4455720"/>
           </a:xfrm>
           <a:prstGeom prst="rect">
             <a:avLst/>
@@ -1371,7 +1365,7 @@
       </p:sp>
       <p:sp>
         <p:nvSpPr>
-          <p:cNvPr id="5" name="PlaceHolder 2"/>
+          <p:cNvPr id="6" name="PlaceHolder 2"/>
           <p:cNvSpPr>
             <a:spLocks noGrp="1"/>
           </p:cNvSpPr>
@@ -1382,7 +1376,7 @@
         <p:spPr>
           <a:xfrm>
             <a:off x="479880" y="2995560"/>
-            <a:ext cx="8640720" cy="7424280"/>
+            <a:ext cx="8640360" cy="7423920"/>
           </a:xfrm>
           <a:prstGeom prst="rect">
             <a:avLst/>
@@ -1440,7 +1434,7 @@
         <p:txBody>
           <a:bodyPr/>
           <a:p>
-            <a:fld id="{1B5AB8E1-0D92-49E0-BCBA-BD07F51E9699}" type="slidenum">
+            <a:fld id="{5295AB37-2BA9-482E-9E34-9E30230D2038}" type="slidenum">
               <a:t>&lt;#&gt;</a:t>
             </a:fld>
           </a:p>
@@ -1491,7 +1485,7 @@
       </p:grpSpPr>
       <p:sp>
         <p:nvSpPr>
-          <p:cNvPr id="6" name="PlaceHolder 1"/>
+          <p:cNvPr id="7" name="PlaceHolder 1"/>
           <p:cNvSpPr>
             <a:spLocks noGrp="1"/>
           </p:cNvSpPr>
@@ -1502,7 +1496,7 @@
         <p:spPr>
           <a:xfrm>
             <a:off x="720000" y="2095200"/>
-            <a:ext cx="8160480" cy="4456080"/>
+            <a:ext cx="8160120" cy="4455720"/>
           </a:xfrm>
           <a:prstGeom prst="rect">
             <a:avLst/>
@@ -1528,7 +1522,7 @@
       </p:sp>
       <p:sp>
         <p:nvSpPr>
-          <p:cNvPr id="7" name="PlaceHolder 2"/>
+          <p:cNvPr id="8" name="PlaceHolder 2"/>
           <p:cNvSpPr>
             <a:spLocks noGrp="1"/>
           </p:cNvSpPr>
@@ -1539,7 +1533,7 @@
         <p:spPr>
           <a:xfrm>
             <a:off x="479880" y="2995560"/>
-            <a:ext cx="8640720" cy="7424280"/>
+            <a:ext cx="8640360" cy="7423920"/>
           </a:xfrm>
           <a:prstGeom prst="rect">
             <a:avLst/>
@@ -1594,7 +1588,7 @@
         <p:txBody>
           <a:bodyPr/>
           <a:p>
-            <a:fld id="{D709DBDC-4EDC-4776-8CC9-57629F3C1C81}" type="slidenum">
+            <a:fld id="{91BD86ED-182A-49C4-8C3E-9B5104BBF1E0}" type="slidenum">
               <a:t>&lt;#&gt;</a:t>
             </a:fld>
           </a:p>
@@ -1645,7 +1639,7 @@
       </p:grpSpPr>
       <p:sp>
         <p:nvSpPr>
-          <p:cNvPr id="8" name="PlaceHolder 1"/>
+          <p:cNvPr id="9" name="PlaceHolder 1"/>
           <p:cNvSpPr>
             <a:spLocks noGrp="1"/>
           </p:cNvSpPr>
@@ -1656,7 +1650,7 @@
         <p:spPr>
           <a:xfrm>
             <a:off x="720000" y="2095200"/>
-            <a:ext cx="8160480" cy="4456080"/>
+            <a:ext cx="8160120" cy="4455720"/>
           </a:xfrm>
           <a:prstGeom prst="rect">
             <a:avLst/>
@@ -1682,7 +1676,7 @@
       </p:sp>
       <p:sp>
         <p:nvSpPr>
-          <p:cNvPr id="9" name="PlaceHolder 2"/>
+          <p:cNvPr id="10" name="PlaceHolder 2"/>
           <p:cNvSpPr>
             <a:spLocks noGrp="1"/>
           </p:cNvSpPr>
@@ -1693,7 +1687,7 @@
         <p:spPr>
           <a:xfrm>
             <a:off x="479880" y="2995560"/>
-            <a:ext cx="4216320" cy="7424280"/>
+            <a:ext cx="4216320" cy="7423920"/>
           </a:xfrm>
           <a:prstGeom prst="rect">
             <a:avLst/>
@@ -1716,7 +1710,7 @@
       </p:sp>
       <p:sp>
         <p:nvSpPr>
-          <p:cNvPr id="10" name="PlaceHolder 3"/>
+          <p:cNvPr id="11" name="PlaceHolder 3"/>
           <p:cNvSpPr>
             <a:spLocks noGrp="1"/>
           </p:cNvSpPr>
@@ -1727,7 +1721,7 @@
         <p:spPr>
           <a:xfrm>
             <a:off x="4907520" y="2995560"/>
-            <a:ext cx="4216320" cy="7424280"/>
+            <a:ext cx="4216320" cy="7423920"/>
           </a:xfrm>
           <a:prstGeom prst="rect">
             <a:avLst/>
@@ -1782,7 +1776,7 @@
         <p:txBody>
           <a:bodyPr/>
           <a:p>
-            <a:fld id="{0972DFFC-D746-4B87-8D13-8B2E20C2B8C8}" type="slidenum">
+            <a:fld id="{C9CAB6E6-96DE-4E57-A5D7-FE3E4B6F054C}" type="slidenum">
               <a:t>&lt;#&gt;</a:t>
             </a:fld>
           </a:p>
@@ -1833,7 +1827,7 @@
       </p:grpSpPr>
       <p:sp>
         <p:nvSpPr>
-          <p:cNvPr id="11" name="PlaceHolder 1"/>
+          <p:cNvPr id="12" name="PlaceHolder 1"/>
           <p:cNvSpPr>
             <a:spLocks noGrp="1"/>
           </p:cNvSpPr>
@@ -1844,7 +1838,7 @@
         <p:spPr>
           <a:xfrm>
             <a:off x="720000" y="2095200"/>
-            <a:ext cx="8160480" cy="4456080"/>
+            <a:ext cx="8160120" cy="4455720"/>
           </a:xfrm>
           <a:prstGeom prst="rect">
             <a:avLst/>
@@ -1902,7 +1896,7 @@
         <p:txBody>
           <a:bodyPr/>
           <a:p>
-            <a:fld id="{6E03C8F9-282E-4385-8581-A1BC9C9DB120}" type="slidenum">
+            <a:fld id="{916A6122-9229-4AE9-9CE4-067B227D09A7}" type="slidenum">
               <a:t>&lt;#&gt;</a:t>
             </a:fld>
           </a:p>
@@ -1953,7 +1947,7 @@
       </p:grpSpPr>
       <p:sp>
         <p:nvSpPr>
-          <p:cNvPr id="12" name="PlaceHolder 1"/>
+          <p:cNvPr id="13" name="PlaceHolder 1"/>
           <p:cNvSpPr>
             <a:spLocks noGrp="1"/>
           </p:cNvSpPr>
@@ -1964,7 +1958,7 @@
         <p:spPr>
           <a:xfrm>
             <a:off x="720000" y="2095200"/>
-            <a:ext cx="8160480" cy="20657160"/>
+            <a:ext cx="8160120" cy="20655360"/>
           </a:xfrm>
           <a:prstGeom prst="rect">
             <a:avLst/>
@@ -2022,7 +2016,7 @@
         <p:txBody>
           <a:bodyPr/>
           <a:p>
-            <a:fld id="{0CD59C8F-0B15-44F7-9B45-F0BB813489E0}" type="slidenum">
+            <a:fld id="{9B1728DE-B307-4EC4-A196-E28ECA83CEA5}" type="slidenum">
               <a:t>&lt;#&gt;</a:t>
             </a:fld>
           </a:p>
@@ -2073,7 +2067,7 @@
       </p:grpSpPr>
       <p:sp>
         <p:nvSpPr>
-          <p:cNvPr id="13" name="PlaceHolder 1"/>
+          <p:cNvPr id="14" name="PlaceHolder 1"/>
           <p:cNvSpPr>
             <a:spLocks noGrp="1"/>
           </p:cNvSpPr>
@@ -2084,7 +2078,7 @@
         <p:spPr>
           <a:xfrm>
             <a:off x="720000" y="2095200"/>
-            <a:ext cx="8160480" cy="4456080"/>
+            <a:ext cx="8160120" cy="4455720"/>
           </a:xfrm>
           <a:prstGeom prst="rect">
             <a:avLst/>
@@ -2110,7 +2104,7 @@
       </p:sp>
       <p:sp>
         <p:nvSpPr>
-          <p:cNvPr id="14" name="PlaceHolder 2"/>
+          <p:cNvPr id="15" name="PlaceHolder 2"/>
           <p:cNvSpPr>
             <a:spLocks noGrp="1"/>
           </p:cNvSpPr>
@@ -2121,7 +2115,7 @@
         <p:spPr>
           <a:xfrm>
             <a:off x="479880" y="2995560"/>
-            <a:ext cx="4216320" cy="3541320"/>
+            <a:ext cx="4216320" cy="3540960"/>
           </a:xfrm>
           <a:prstGeom prst="rect">
             <a:avLst/>
@@ -2144,7 +2138,7 @@
       </p:sp>
       <p:sp>
         <p:nvSpPr>
-          <p:cNvPr id="15" name="PlaceHolder 3"/>
+          <p:cNvPr id="16" name="PlaceHolder 3"/>
           <p:cNvSpPr>
             <a:spLocks noGrp="1"/>
           </p:cNvSpPr>
@@ -2155,7 +2149,7 @@
         <p:spPr>
           <a:xfrm>
             <a:off x="4907520" y="2995560"/>
-            <a:ext cx="4216320" cy="7424280"/>
+            <a:ext cx="4216320" cy="7423920"/>
           </a:xfrm>
           <a:prstGeom prst="rect">
             <a:avLst/>
@@ -2178,7 +2172,7 @@
       </p:sp>
       <p:sp>
         <p:nvSpPr>
-          <p:cNvPr id="16" name="PlaceHolder 4"/>
+          <p:cNvPr id="17" name="PlaceHolder 4"/>
           <p:cNvSpPr>
             <a:spLocks noGrp="1"/>
           </p:cNvSpPr>
@@ -2188,8 +2182,8 @@
         </p:nvSpPr>
         <p:spPr>
           <a:xfrm>
-            <a:off x="479880" y="6873840"/>
-            <a:ext cx="4216320" cy="3541320"/>
+            <a:off x="479880" y="6873480"/>
+            <a:ext cx="4216320" cy="3540960"/>
           </a:xfrm>
           <a:prstGeom prst="rect">
             <a:avLst/>
@@ -2244,7 +2238,7 @@
         <p:txBody>
           <a:bodyPr/>
           <a:p>
-            <a:fld id="{57804D87-E912-402C-9428-0A209CBF9292}" type="slidenum">
+            <a:fld id="{6FA7D798-260C-4596-8600-4C2E7AF167C9}" type="slidenum">
               <a:t>&lt;#&gt;</a:t>
             </a:fld>
           </a:p>
@@ -2295,7 +2289,7 @@
       </p:grpSpPr>
       <p:sp>
         <p:nvSpPr>
-          <p:cNvPr id="17" name="PlaceHolder 1"/>
+          <p:cNvPr id="18" name="PlaceHolder 1"/>
           <p:cNvSpPr>
             <a:spLocks noGrp="1"/>
           </p:cNvSpPr>
@@ -2306,7 +2300,7 @@
         <p:spPr>
           <a:xfrm>
             <a:off x="720000" y="2095200"/>
-            <a:ext cx="8160480" cy="4456080"/>
+            <a:ext cx="8160120" cy="4455720"/>
           </a:xfrm>
           <a:prstGeom prst="rect">
             <a:avLst/>
@@ -2332,7 +2326,7 @@
       </p:sp>
       <p:sp>
         <p:nvSpPr>
-          <p:cNvPr id="18" name="PlaceHolder 2"/>
+          <p:cNvPr id="19" name="PlaceHolder 2"/>
           <p:cNvSpPr>
             <a:spLocks noGrp="1"/>
           </p:cNvSpPr>
@@ -2343,7 +2337,7 @@
         <p:spPr>
           <a:xfrm>
             <a:off x="479880" y="2995560"/>
-            <a:ext cx="4216320" cy="7424280"/>
+            <a:ext cx="4216320" cy="7423920"/>
           </a:xfrm>
           <a:prstGeom prst="rect">
             <a:avLst/>
@@ -2366,7 +2360,7 @@
       </p:sp>
       <p:sp>
         <p:nvSpPr>
-          <p:cNvPr id="19" name="PlaceHolder 3"/>
+          <p:cNvPr id="20" name="PlaceHolder 3"/>
           <p:cNvSpPr>
             <a:spLocks noGrp="1"/>
           </p:cNvSpPr>
@@ -2377,7 +2371,7 @@
         <p:spPr>
           <a:xfrm>
             <a:off x="4907520" y="2995560"/>
-            <a:ext cx="4216320" cy="3541320"/>
+            <a:ext cx="4216320" cy="3540960"/>
           </a:xfrm>
           <a:prstGeom prst="rect">
             <a:avLst/>
@@ -2400,7 +2394,7 @@
       </p:sp>
       <p:sp>
         <p:nvSpPr>
-          <p:cNvPr id="20" name="PlaceHolder 4"/>
+          <p:cNvPr id="21" name="PlaceHolder 4"/>
           <p:cNvSpPr>
             <a:spLocks noGrp="1"/>
           </p:cNvSpPr>
@@ -2410,8 +2404,8 @@
         </p:nvSpPr>
         <p:spPr>
           <a:xfrm>
-            <a:off x="4907520" y="6873840"/>
-            <a:ext cx="4216320" cy="3541320"/>
+            <a:off x="4907520" y="6873480"/>
+            <a:ext cx="4216320" cy="3540960"/>
           </a:xfrm>
           <a:prstGeom prst="rect">
             <a:avLst/>
@@ -2466,7 +2460,7 @@
         <p:txBody>
           <a:bodyPr/>
           <a:p>
-            <a:fld id="{4171E665-5214-4AE2-91DE-2C366332E982}" type="slidenum">
+            <a:fld id="{684EA310-9FD7-40A6-8286-1E3B57117295}" type="slidenum">
               <a:t>&lt;#&gt;</a:t>
             </a:fld>
           </a:p>
@@ -2517,7 +2511,7 @@
       </p:grpSpPr>
       <p:sp>
         <p:nvSpPr>
-          <p:cNvPr id="21" name="PlaceHolder 1"/>
+          <p:cNvPr id="22" name="PlaceHolder 1"/>
           <p:cNvSpPr>
             <a:spLocks noGrp="1"/>
           </p:cNvSpPr>
@@ -2528,7 +2522,7 @@
         <p:spPr>
           <a:xfrm>
             <a:off x="720000" y="2095200"/>
-            <a:ext cx="8160480" cy="4456080"/>
+            <a:ext cx="8160120" cy="4455720"/>
           </a:xfrm>
           <a:prstGeom prst="rect">
             <a:avLst/>
@@ -2554,7 +2548,7 @@
       </p:sp>
       <p:sp>
         <p:nvSpPr>
-          <p:cNvPr id="22" name="PlaceHolder 2"/>
+          <p:cNvPr id="23" name="PlaceHolder 2"/>
           <p:cNvSpPr>
             <a:spLocks noGrp="1"/>
           </p:cNvSpPr>
@@ -2565,7 +2559,7 @@
         <p:spPr>
           <a:xfrm>
             <a:off x="479880" y="2995560"/>
-            <a:ext cx="4216320" cy="3541320"/>
+            <a:ext cx="4216320" cy="3540960"/>
           </a:xfrm>
           <a:prstGeom prst="rect">
             <a:avLst/>
@@ -2588,7 +2582,7 @@
       </p:sp>
       <p:sp>
         <p:nvSpPr>
-          <p:cNvPr id="23" name="PlaceHolder 3"/>
+          <p:cNvPr id="24" name="PlaceHolder 3"/>
           <p:cNvSpPr>
             <a:spLocks noGrp="1"/>
           </p:cNvSpPr>
@@ -2599,7 +2593,7 @@
         <p:spPr>
           <a:xfrm>
             <a:off x="4907520" y="2995560"/>
-            <a:ext cx="4216320" cy="3541320"/>
+            <a:ext cx="4216320" cy="3540960"/>
           </a:xfrm>
           <a:prstGeom prst="rect">
             <a:avLst/>
@@ -2622,7 +2616,7 @@
       </p:sp>
       <p:sp>
         <p:nvSpPr>
-          <p:cNvPr id="24" name="PlaceHolder 4"/>
+          <p:cNvPr id="25" name="PlaceHolder 4"/>
           <p:cNvSpPr>
             <a:spLocks noGrp="1"/>
           </p:cNvSpPr>
@@ -2632,8 +2626,8 @@
         </p:nvSpPr>
         <p:spPr>
           <a:xfrm>
-            <a:off x="479880" y="6873840"/>
-            <a:ext cx="8640720" cy="3541320"/>
+            <a:off x="479880" y="6873480"/>
+            <a:ext cx="8640360" cy="3540960"/>
           </a:xfrm>
           <a:prstGeom prst="rect">
             <a:avLst/>
@@ -2688,7 +2682,7 @@
         <p:txBody>
           <a:bodyPr/>
           <a:p>
-            <a:fld id="{141E023D-76EE-4A63-9A4B-68F42CA9EA40}" type="slidenum">
+            <a:fld id="{E95B2E0D-60F4-485A-A1E8-0D48A3F77DFD}" type="slidenum">
               <a:t>&lt;#&gt;</a:t>
             </a:fld>
           </a:p>
@@ -2757,7 +2751,7 @@
         <p:spPr>
           <a:xfrm>
             <a:off x="720000" y="2095200"/>
-            <a:ext cx="8160480" cy="4456080"/>
+            <a:ext cx="8160120" cy="4455720"/>
           </a:xfrm>
           <a:prstGeom prst="rect">
             <a:avLst/>
@@ -2791,13 +2785,196 @@
             <a:spLocks noGrp="1"/>
           </p:cNvSpPr>
           <p:nvPr>
+            <p:ph type="body"/>
+          </p:nvPr>
+        </p:nvSpPr>
+        <p:spPr>
+          <a:xfrm>
+            <a:off x="479880" y="2995560"/>
+            <a:ext cx="8640360" cy="7423920"/>
+          </a:xfrm>
+          <a:prstGeom prst="rect">
+            <a:avLst/>
+          </a:prstGeom>
+          <a:noFill/>
+          <a:ln w="0">
+            <a:noFill/>
+          </a:ln>
+        </p:spPr>
+        <p:txBody>
+          <a:bodyPr lIns="0" rIns="0" tIns="0" bIns="0" anchor="t">
+            <a:normAutofit/>
+          </a:bodyPr>
+          <a:p>
+            <a:pPr marL="432000" indent="-324000">
+              <a:spcBef>
+                <a:spcPts val="1417"/>
+              </a:spcBef>
+              <a:buClr>
+                <a:srgbClr val="000000"/>
+              </a:buClr>
+              <a:buSzPct val="45000"/>
+              <a:buFont typeface="Wingdings" charset="2"/>
+              <a:buChar char=""/>
+            </a:pPr>
+            <a:r>
+              <a:rPr b="0" lang="en-US" sz="1800" spc="-1" strike="noStrike">
+                <a:latin typeface="Arial"/>
+              </a:rPr>
+              <a:t>Click to edit the outline text format</a:t>
+            </a:r>
+            <a:endParaRPr b="0" lang="en-US" sz="1800" spc="-1" strike="noStrike">
+              <a:latin typeface="Arial"/>
+            </a:endParaRPr>
+          </a:p>
+          <a:p>
+            <a:pPr lvl="1" marL="864000" indent="-324000">
+              <a:spcBef>
+                <a:spcPts val="1134"/>
+              </a:spcBef>
+              <a:buClr>
+                <a:srgbClr val="000000"/>
+              </a:buClr>
+              <a:buSzPct val="75000"/>
+              <a:buFont typeface="Symbol" charset="2"/>
+              <a:buChar char=""/>
+            </a:pPr>
+            <a:r>
+              <a:rPr b="0" lang="en-US" sz="1800" spc="-1" strike="noStrike">
+                <a:latin typeface="Arial"/>
+              </a:rPr>
+              <a:t>Second Outline Level</a:t>
+            </a:r>
+            <a:endParaRPr b="0" lang="en-US" sz="1800" spc="-1" strike="noStrike">
+              <a:latin typeface="Arial"/>
+            </a:endParaRPr>
+          </a:p>
+          <a:p>
+            <a:pPr lvl="2" marL="1296000" indent="-288000">
+              <a:spcBef>
+                <a:spcPts val="850"/>
+              </a:spcBef>
+              <a:buClr>
+                <a:srgbClr val="000000"/>
+              </a:buClr>
+              <a:buSzPct val="45000"/>
+              <a:buFont typeface="Wingdings" charset="2"/>
+              <a:buChar char=""/>
+            </a:pPr>
+            <a:r>
+              <a:rPr b="0" lang="en-US" sz="1800" spc="-1" strike="noStrike">
+                <a:latin typeface="Arial"/>
+              </a:rPr>
+              <a:t>Third Outline Level</a:t>
+            </a:r>
+            <a:endParaRPr b="0" lang="en-US" sz="1800" spc="-1" strike="noStrike">
+              <a:latin typeface="Arial"/>
+            </a:endParaRPr>
+          </a:p>
+          <a:p>
+            <a:pPr lvl="3" marL="1728000" indent="-216000">
+              <a:spcBef>
+                <a:spcPts val="567"/>
+              </a:spcBef>
+              <a:buClr>
+                <a:srgbClr val="000000"/>
+              </a:buClr>
+              <a:buSzPct val="75000"/>
+              <a:buFont typeface="Symbol" charset="2"/>
+              <a:buChar char=""/>
+            </a:pPr>
+            <a:r>
+              <a:rPr b="0" lang="en-US" sz="1800" spc="-1" strike="noStrike">
+                <a:latin typeface="Arial"/>
+              </a:rPr>
+              <a:t>Fourth Outline Level</a:t>
+            </a:r>
+            <a:endParaRPr b="0" lang="en-US" sz="1800" spc="-1" strike="noStrike">
+              <a:latin typeface="Arial"/>
+            </a:endParaRPr>
+          </a:p>
+          <a:p>
+            <a:pPr lvl="4" marL="2160000" indent="-216000">
+              <a:spcBef>
+                <a:spcPts val="283"/>
+              </a:spcBef>
+              <a:buClr>
+                <a:srgbClr val="000000"/>
+              </a:buClr>
+              <a:buSzPct val="45000"/>
+              <a:buFont typeface="Wingdings" charset="2"/>
+              <a:buChar char=""/>
+            </a:pPr>
+            <a:r>
+              <a:rPr b="0" lang="en-US" sz="1800" spc="-1" strike="noStrike">
+                <a:latin typeface="Arial"/>
+              </a:rPr>
+              <a:t>Fifth Outline Level</a:t>
+            </a:r>
+            <a:endParaRPr b="0" lang="en-US" sz="1800" spc="-1" strike="noStrike">
+              <a:latin typeface="Arial"/>
+            </a:endParaRPr>
+          </a:p>
+          <a:p>
+            <a:pPr lvl="5" marL="2592000" indent="-216000">
+              <a:spcBef>
+                <a:spcPts val="283"/>
+              </a:spcBef>
+              <a:buClr>
+                <a:srgbClr val="000000"/>
+              </a:buClr>
+              <a:buSzPct val="45000"/>
+              <a:buFont typeface="Wingdings" charset="2"/>
+              <a:buChar char=""/>
+            </a:pPr>
+            <a:r>
+              <a:rPr b="0" lang="en-US" sz="1800" spc="-1" strike="noStrike">
+                <a:latin typeface="Arial"/>
+              </a:rPr>
+              <a:t>Sixth Outline Level</a:t>
+            </a:r>
+            <a:endParaRPr b="0" lang="en-US" sz="1800" spc="-1" strike="noStrike">
+              <a:latin typeface="Arial"/>
+            </a:endParaRPr>
+          </a:p>
+          <a:p>
+            <a:pPr lvl="6" marL="3024000" indent="-216000">
+              <a:spcBef>
+                <a:spcPts val="283"/>
+              </a:spcBef>
+              <a:buClr>
+                <a:srgbClr val="000000"/>
+              </a:buClr>
+              <a:buSzPct val="45000"/>
+              <a:buFont typeface="Wingdings" charset="2"/>
+              <a:buChar char=""/>
+            </a:pPr>
+            <a:r>
+              <a:rPr b="0" lang="en-US" sz="1800" spc="-1" strike="noStrike">
+                <a:latin typeface="Arial"/>
+              </a:rPr>
+              <a:t>Seventh Outline Level</a:t>
+            </a:r>
+            <a:endParaRPr b="0" lang="en-US" sz="1800" spc="-1" strike="noStrike">
+              <a:latin typeface="Arial"/>
+            </a:endParaRPr>
+          </a:p>
+        </p:txBody>
+      </p:sp>
+      <p:sp>
+        <p:nvSpPr>
+          <p:cNvPr id="2" name="PlaceHolder 3"/>
+          <p:cNvSpPr>
+            <a:spLocks noGrp="1"/>
+          </p:cNvSpPr>
+          <p:nvPr>
             <p:ph type="ftr" idx="1"/>
           </p:nvPr>
         </p:nvSpPr>
         <p:spPr>
           <a:xfrm>
             <a:off x="3180240" y="11865240"/>
-            <a:ext cx="3239640" cy="680760"/>
+            <a:ext cx="3239280" cy="680400"/>
           </a:xfrm>
           <a:prstGeom prst="rect">
             <a:avLst/>
@@ -2843,7 +3020,7 @@
       </p:sp>
       <p:sp>
         <p:nvSpPr>
-          <p:cNvPr id="2" name="PlaceHolder 3"/>
+          <p:cNvPr id="3" name="PlaceHolder 4"/>
           <p:cNvSpPr>
             <a:spLocks noGrp="1"/>
           </p:cNvSpPr>
@@ -2854,7 +3031,7 @@
         <p:spPr>
           <a:xfrm>
             <a:off x="6780960" y="11865240"/>
-            <a:ext cx="2159640" cy="680760"/>
+            <a:ext cx="2159280" cy="680400"/>
           </a:xfrm>
           <a:prstGeom prst="rect">
             <a:avLst/>
@@ -2889,7 +3066,7 @@
               </a:lnSpc>
               <a:buNone/>
             </a:pPr>
-            <a:fld id="{3286AD67-C889-44D0-BCD2-E55396BE65C1}" type="slidenum">
+            <a:fld id="{043929C8-12F6-4C83-B065-88C653810E3B}" type="slidenum">
               <a:rPr b="0" lang="de-DE" sz="1260" spc="-1" strike="noStrike">
                 <a:solidFill>
                   <a:srgbClr val="8b8b8b"/>
@@ -2906,7 +3083,7 @@
       </p:sp>
       <p:sp>
         <p:nvSpPr>
-          <p:cNvPr id="3" name="PlaceHolder 4"/>
+          <p:cNvPr id="4" name="PlaceHolder 5"/>
           <p:cNvSpPr>
             <a:spLocks noGrp="1"/>
           </p:cNvSpPr>
@@ -2917,7 +3094,7 @@
         <p:spPr>
           <a:xfrm>
             <a:off x="660240" y="11865240"/>
-            <a:ext cx="2159640" cy="680760"/>
+            <a:ext cx="2159280" cy="680400"/>
           </a:xfrm>
           <a:prstGeom prst="rect">
             <a:avLst/>
@@ -2990,7 +3167,7 @@
       </p:grpSpPr>
       <p:pic>
         <p:nvPicPr>
-          <p:cNvPr id="46" name="Grafik 4" descr=""/>
+          <p:cNvPr id="47" name="Grafik 4" descr=""/>
           <p:cNvPicPr/>
           <p:nvPr/>
         </p:nvPicPr>
@@ -3002,7 +3179,7 @@
         <p:spPr>
           <a:xfrm>
             <a:off x="0" y="0"/>
-            <a:ext cx="9600480" cy="12800880"/>
+            <a:ext cx="9600120" cy="12800520"/>
           </a:xfrm>
           <a:prstGeom prst="rect">
             <a:avLst/>
@@ -3014,14 +3191,14 @@
       </p:pic>
       <p:sp>
         <p:nvSpPr>
-          <p:cNvPr id="47" name="Rechteck 5"/>
+          <p:cNvPr id="48" name="Rechteck 5"/>
           <p:cNvSpPr/>
           <p:nvPr/>
         </p:nvSpPr>
         <p:spPr>
           <a:xfrm>
-            <a:off x="720" y="10640880"/>
-            <a:ext cx="9600480" cy="2160720"/>
+            <a:off x="28080" y="10640880"/>
+            <a:ext cx="9544320" cy="2132280"/>
           </a:xfrm>
           <a:prstGeom prst="rect">
             <a:avLst/>
@@ -3050,21 +3227,21 @@
       </p:sp>
       <p:grpSp>
         <p:nvGrpSpPr>
-          <p:cNvPr id="48" name="Gruppieren 50"/>
+          <p:cNvPr id="49" name="Gruppieren 50"/>
           <p:cNvGrpSpPr/>
           <p:nvPr/>
         </p:nvGrpSpPr>
         <p:grpSpPr>
           <a:xfrm>
-            <a:off x="6243840" y="7956720"/>
-            <a:ext cx="4333320" cy="4699080"/>
-            <a:chOff x="6243840" y="7956720"/>
-            <a:chExt cx="4333320" cy="4699080"/>
+            <a:off x="6243480" y="7956360"/>
+            <a:ext cx="4332600" cy="4698720"/>
+            <a:chOff x="6243480" y="7956360"/>
+            <a:chExt cx="4332600" cy="4698720"/>
           </a:xfrm>
         </p:grpSpPr>
         <p:pic>
           <p:nvPicPr>
-            <p:cNvPr id="49" name="Grafik 7" descr=""/>
+            <p:cNvPr id="50" name="Grafik 7" descr=""/>
             <p:cNvPicPr/>
             <p:nvPr/>
           </p:nvPicPr>
@@ -3075,8 +3252,8 @@
           </p:blipFill>
           <p:spPr>
             <a:xfrm rot="19750200">
-              <a:off x="7027560" y="8394840"/>
-              <a:ext cx="2765160" cy="3822120"/>
+              <a:off x="7027200" y="8394480"/>
+              <a:ext cx="2764800" cy="3821760"/>
             </a:xfrm>
             <a:prstGeom prst="rect">
               <a:avLst/>
@@ -3088,14 +3265,14 @@
         </p:pic>
         <p:sp>
           <p:nvSpPr>
-            <p:cNvPr id="50" name="Textfeld 8"/>
+            <p:cNvPr id="51" name="Textfeld 8"/>
             <p:cNvSpPr/>
             <p:nvPr/>
           </p:nvSpPr>
           <p:spPr>
             <a:xfrm rot="19801200">
-              <a:off x="7186680" y="9360000"/>
-              <a:ext cx="2166480" cy="637920"/>
+              <a:off x="7186320" y="9360000"/>
+              <a:ext cx="2166120" cy="637560"/>
             </a:xfrm>
             <a:prstGeom prst="rect">
               <a:avLst/>
@@ -3115,14 +3292,14 @@
       </p:grpSp>
       <p:sp>
         <p:nvSpPr>
-          <p:cNvPr id="51" name="Rechteck 9"/>
+          <p:cNvPr id="52" name="Rechteck 9"/>
           <p:cNvSpPr/>
           <p:nvPr/>
         </p:nvSpPr>
         <p:spPr>
           <a:xfrm>
             <a:off x="925920" y="10559160"/>
-            <a:ext cx="7748640" cy="1430280"/>
+            <a:ext cx="7748280" cy="1430280"/>
           </a:xfrm>
           <a:prstGeom prst="rect">
             <a:avLst/>
@@ -3157,7 +3334,7 @@
               <a:buNone/>
             </a:pPr>
             <a:r>
-              <a:rPr b="1" lang="de-DE" sz="8800" spc="46" strike="noStrike">
+              <a:rPr b="1" lang="de-DE" sz="8800" spc="43" strike="noStrike">
                 <a:solidFill>
                   <a:srgbClr val="27570e"/>
                 </a:solidFill>
@@ -3174,7 +3351,7 @@
       </p:sp>
       <p:pic>
         <p:nvPicPr>
-          <p:cNvPr id="52" name="Grafik 11" descr="Einhorn mit einfarbiger Füllung"/>
+          <p:cNvPr id="53" name="Grafik 11" descr="Einhorn mit einfarbiger Füllung"/>
           <p:cNvPicPr/>
           <p:nvPr/>
         </p:nvPicPr>
@@ -3184,8 +3361,8 @@
         </p:blipFill>
         <p:spPr>
           <a:xfrm rot="19121400">
-            <a:off x="7308000" y="5235480"/>
-            <a:ext cx="913680" cy="913680"/>
+            <a:off x="7307640" y="5235480"/>
+            <a:ext cx="913320" cy="913320"/>
           </a:xfrm>
           <a:prstGeom prst="rect">
             <a:avLst/>
@@ -3197,14 +3374,14 @@
       </p:pic>
       <p:sp>
         <p:nvSpPr>
-          <p:cNvPr id="53" name="Sprechblase: oval 13"/>
+          <p:cNvPr id="54" name="Sprechblase: oval 13"/>
           <p:cNvSpPr/>
           <p:nvPr/>
         </p:nvSpPr>
         <p:spPr>
           <a:xfrm>
             <a:off x="5676120" y="254880"/>
-            <a:ext cx="2931480" cy="1726920"/>
+            <a:ext cx="2931120" cy="1726560"/>
           </a:xfrm>
           <a:prstGeom prst="wedgeEllipseCallout">
             <a:avLst>
@@ -3262,42 +3439,42 @@
       </p:sp>
       <p:grpSp>
         <p:nvGrpSpPr>
-          <p:cNvPr id="54" name="Gruppieren 44"/>
+          <p:cNvPr id="55" name=""/>
           <p:cNvGrpSpPr/>
           <p:nvPr/>
         </p:nvGrpSpPr>
         <p:grpSpPr>
           <a:xfrm>
             <a:off x="152280" y="263160"/>
-            <a:ext cx="4045320" cy="927720"/>
+            <a:ext cx="4044960" cy="927360"/>
             <a:chOff x="152280" y="263160"/>
-            <a:chExt cx="4045320" cy="927720"/>
+            <a:chExt cx="4044960" cy="927360"/>
           </a:xfrm>
         </p:grpSpPr>
         <p:grpSp>
           <p:nvGrpSpPr>
-            <p:cNvPr id="55" name="Gruppieren 42"/>
+            <p:cNvPr id="56" name="Gruppieren 42"/>
             <p:cNvGrpSpPr/>
             <p:nvPr/>
           </p:nvGrpSpPr>
           <p:grpSpPr>
             <a:xfrm>
               <a:off x="795960" y="263160"/>
-              <a:ext cx="3401640" cy="927720"/>
+              <a:ext cx="3401280" cy="927360"/>
               <a:chOff x="795960" y="263160"/>
-              <a:chExt cx="3401640" cy="927720"/>
+              <a:chExt cx="3401280" cy="927360"/>
             </a:xfrm>
           </p:grpSpPr>
           <p:sp>
             <p:nvSpPr>
-              <p:cNvPr id="56" name="Rechteck: abgerundete Ecken 24"/>
+              <p:cNvPr id="57" name="Rechteck: abgerundete Ecken 24"/>
               <p:cNvSpPr/>
               <p:nvPr/>
             </p:nvSpPr>
             <p:spPr>
               <a:xfrm>
                 <a:off x="795960" y="263160"/>
-                <a:ext cx="3401640" cy="927720"/>
+                <a:ext cx="3401280" cy="927360"/>
               </a:xfrm>
               <a:prstGeom prst="roundRect">
                 <a:avLst>
@@ -3328,14 +3505,14 @@
           </p:sp>
           <p:sp>
             <p:nvSpPr>
-              <p:cNvPr id="57" name="Textfeld 14"/>
+              <p:cNvPr id="58" name="Textfeld 14"/>
               <p:cNvSpPr/>
               <p:nvPr/>
             </p:nvSpPr>
             <p:spPr>
               <a:xfrm>
                 <a:off x="917640" y="403920"/>
-                <a:ext cx="3157920" cy="638280"/>
+                <a:ext cx="3157560" cy="638280"/>
               </a:xfrm>
               <a:prstGeom prst="rect">
                 <a:avLst/>
@@ -3370,7 +3547,187 @@
                     <a:latin typeface="Calibri"/>
                     <a:ea typeface="DejaVu Sans"/>
                   </a:rPr>
-                  <a:t>Du hast Spaß an IT-Spielereien bzw. -Herausforderungen?</a:t>
+                  <a:t>Du </a:t>
+                </a:r>
+                <a:r>
+                  <a:rPr b="0" lang="de-DE" sz="1800" spc="-1" strike="noStrike">
+                    <a:solidFill>
+                      <a:srgbClr val="000000"/>
+                    </a:solidFill>
+                    <a:latin typeface="Calibri"/>
+                    <a:ea typeface="DejaVu Sans"/>
+                  </a:rPr>
+                  <a:t>has</a:t>
+                </a:r>
+                <a:r>
+                  <a:rPr b="0" lang="de-DE" sz="1800" spc="-1" strike="noStrike">
+                    <a:solidFill>
+                      <a:srgbClr val="000000"/>
+                    </a:solidFill>
+                    <a:latin typeface="Calibri"/>
+                    <a:ea typeface="DejaVu Sans"/>
+                  </a:rPr>
+                  <a:t>t </a:t>
+                </a:r>
+                <a:r>
+                  <a:rPr b="0" lang="de-DE" sz="1800" spc="-1" strike="noStrike">
+                    <a:solidFill>
+                      <a:srgbClr val="000000"/>
+                    </a:solidFill>
+                    <a:latin typeface="Calibri"/>
+                    <a:ea typeface="DejaVu Sans"/>
+                  </a:rPr>
+                  <a:t>Spa</a:t>
+                </a:r>
+                <a:r>
+                  <a:rPr b="0" lang="de-DE" sz="1800" spc="-1" strike="noStrike">
+                    <a:solidFill>
+                      <a:srgbClr val="000000"/>
+                    </a:solidFill>
+                    <a:latin typeface="Calibri"/>
+                    <a:ea typeface="DejaVu Sans"/>
+                  </a:rPr>
+                  <a:t>ß </a:t>
+                </a:r>
+                <a:r>
+                  <a:rPr b="0" lang="de-DE" sz="1800" spc="-1" strike="noStrike">
+                    <a:solidFill>
+                      <a:srgbClr val="000000"/>
+                    </a:solidFill>
+                    <a:latin typeface="Calibri"/>
+                    <a:ea typeface="DejaVu Sans"/>
+                  </a:rPr>
+                  <a:t>an </a:t>
+                </a:r>
+                <a:r>
+                  <a:rPr b="0" lang="de-DE" sz="1800" spc="-1" strike="noStrike">
+                    <a:solidFill>
+                      <a:srgbClr val="000000"/>
+                    </a:solidFill>
+                    <a:latin typeface="Calibri"/>
+                    <a:ea typeface="DejaVu Sans"/>
+                  </a:rPr>
+                  <a:t>IT-</a:t>
+                </a:r>
+                <a:r>
+                  <a:rPr b="0" lang="de-DE" sz="1800" spc="-1" strike="noStrike">
+                    <a:solidFill>
+                      <a:srgbClr val="000000"/>
+                    </a:solidFill>
+                    <a:latin typeface="Calibri"/>
+                    <a:ea typeface="DejaVu Sans"/>
+                  </a:rPr>
+                  <a:t>Spi</a:t>
+                </a:r>
+                <a:r>
+                  <a:rPr b="0" lang="de-DE" sz="1800" spc="-1" strike="noStrike">
+                    <a:solidFill>
+                      <a:srgbClr val="000000"/>
+                    </a:solidFill>
+                    <a:latin typeface="Calibri"/>
+                    <a:ea typeface="DejaVu Sans"/>
+                  </a:rPr>
+                  <a:t>ele</a:t>
+                </a:r>
+                <a:r>
+                  <a:rPr b="0" lang="de-DE" sz="1800" spc="-1" strike="noStrike">
+                    <a:solidFill>
+                      <a:srgbClr val="000000"/>
+                    </a:solidFill>
+                    <a:latin typeface="Calibri"/>
+                    <a:ea typeface="DejaVu Sans"/>
+                  </a:rPr>
+                  <a:t>rei</a:t>
+                </a:r>
+                <a:r>
+                  <a:rPr b="0" lang="de-DE" sz="1800" spc="-1" strike="noStrike">
+                    <a:solidFill>
+                      <a:srgbClr val="000000"/>
+                    </a:solidFill>
+                    <a:latin typeface="Calibri"/>
+                    <a:ea typeface="DejaVu Sans"/>
+                  </a:rPr>
+                  <a:t>en </a:t>
+                </a:r>
+                <a:r>
+                  <a:rPr b="0" lang="de-DE" sz="1800" spc="-1" strike="noStrike">
+                    <a:solidFill>
+                      <a:srgbClr val="000000"/>
+                    </a:solidFill>
+                    <a:latin typeface="Calibri"/>
+                    <a:ea typeface="DejaVu Sans"/>
+                  </a:rPr>
+                  <a:t>bzw</a:t>
+                </a:r>
+                <a:r>
+                  <a:rPr b="0" lang="de-DE" sz="1800" spc="-1" strike="noStrike">
+                    <a:solidFill>
+                      <a:srgbClr val="000000"/>
+                    </a:solidFill>
+                    <a:latin typeface="Calibri"/>
+                    <a:ea typeface="DejaVu Sans"/>
+                  </a:rPr>
+                  <a:t>. -</a:t>
+                </a:r>
+                <a:r>
+                  <a:rPr b="0" lang="de-DE" sz="1800" spc="-1" strike="noStrike">
+                    <a:solidFill>
+                      <a:srgbClr val="000000"/>
+                    </a:solidFill>
+                    <a:latin typeface="Calibri"/>
+                    <a:ea typeface="DejaVu Sans"/>
+                  </a:rPr>
+                  <a:t>Her</a:t>
+                </a:r>
+                <a:r>
+                  <a:rPr b="0" lang="de-DE" sz="1800" spc="-1" strike="noStrike">
+                    <a:solidFill>
+                      <a:srgbClr val="000000"/>
+                    </a:solidFill>
+                    <a:latin typeface="Calibri"/>
+                    <a:ea typeface="DejaVu Sans"/>
+                  </a:rPr>
+                  <a:t>aus</a:t>
+                </a:r>
+                <a:r>
+                  <a:rPr b="0" lang="de-DE" sz="1800" spc="-1" strike="noStrike">
+                    <a:solidFill>
+                      <a:srgbClr val="000000"/>
+                    </a:solidFill>
+                    <a:latin typeface="Calibri"/>
+                    <a:ea typeface="DejaVu Sans"/>
+                  </a:rPr>
+                  <a:t>for</a:t>
+                </a:r>
+                <a:r>
+                  <a:rPr b="0" lang="de-DE" sz="1800" spc="-1" strike="noStrike">
+                    <a:solidFill>
+                      <a:srgbClr val="000000"/>
+                    </a:solidFill>
+                    <a:latin typeface="Calibri"/>
+                    <a:ea typeface="DejaVu Sans"/>
+                  </a:rPr>
+                  <a:t>der</a:t>
+                </a:r>
+                <a:r>
+                  <a:rPr b="0" lang="de-DE" sz="1800" spc="-1" strike="noStrike">
+                    <a:solidFill>
+                      <a:srgbClr val="000000"/>
+                    </a:solidFill>
+                    <a:latin typeface="Calibri"/>
+                    <a:ea typeface="DejaVu Sans"/>
+                  </a:rPr>
+                  <a:t>ung</a:t>
+                </a:r>
+                <a:r>
+                  <a:rPr b="0" lang="de-DE" sz="1800" spc="-1" strike="noStrike">
+                    <a:solidFill>
+                      <a:srgbClr val="000000"/>
+                    </a:solidFill>
+                    <a:latin typeface="Calibri"/>
+                    <a:ea typeface="DejaVu Sans"/>
+                  </a:rPr>
+                  <a:t>en?</a:t>
                 </a:r>
                 <a:endParaRPr b="0" lang="en-US" sz="1800" spc="-1" strike="noStrike">
                   <a:latin typeface="Arial"/>
@@ -3381,28 +3738,28 @@
         </p:grpSp>
         <p:grpSp>
           <p:nvGrpSpPr>
-            <p:cNvPr id="58" name="Gruppieren 28"/>
+            <p:cNvPr id="59" name="Gruppieren 28"/>
             <p:cNvGrpSpPr/>
             <p:nvPr/>
           </p:nvGrpSpPr>
           <p:grpSpPr>
             <a:xfrm>
               <a:off x="152280" y="344520"/>
-              <a:ext cx="765000" cy="765000"/>
+              <a:ext cx="764640" cy="764640"/>
               <a:chOff x="152280" y="344520"/>
-              <a:chExt cx="765000" cy="765000"/>
+              <a:chExt cx="764640" cy="764640"/>
             </a:xfrm>
           </p:grpSpPr>
           <p:sp>
             <p:nvSpPr>
-              <p:cNvPr id="59" name="Ellipse 27"/>
+              <p:cNvPr id="60" name="Ellipse 27"/>
               <p:cNvSpPr/>
               <p:nvPr/>
             </p:nvSpPr>
             <p:spPr>
               <a:xfrm>
                 <a:off x="152280" y="344520"/>
-                <a:ext cx="765000" cy="765000"/>
+                <a:ext cx="764640" cy="764640"/>
               </a:xfrm>
               <a:prstGeom prst="ellipse">
                 <a:avLst/>
@@ -3433,7 +3790,7 @@
           </p:sp>
           <p:pic>
             <p:nvPicPr>
-              <p:cNvPr id="60" name="Grafik 26" descr="Fragezeichen mit einfarbiger Füllung"/>
+              <p:cNvPr id="61" name="Grafik 26" descr="Fragezeichen mit einfarbiger Füllung"/>
               <p:cNvPicPr/>
               <p:nvPr/>
             </p:nvPicPr>
@@ -3444,7 +3801,7 @@
             <p:spPr>
               <a:xfrm>
                 <a:off x="210960" y="403200"/>
-                <a:ext cx="647280" cy="647280"/>
+                <a:ext cx="646920" cy="646920"/>
               </a:xfrm>
               <a:prstGeom prst="rect">
                 <a:avLst/>
@@ -3458,42 +3815,42 @@
       </p:grpSp>
       <p:grpSp>
         <p:nvGrpSpPr>
-          <p:cNvPr id="61" name="Gruppieren 43"/>
+          <p:cNvPr id="62" name=""/>
           <p:cNvGrpSpPr/>
           <p:nvPr/>
         </p:nvGrpSpPr>
         <p:grpSpPr>
           <a:xfrm>
-            <a:off x="678960" y="1406160"/>
-            <a:ext cx="4416840" cy="1105200"/>
-            <a:chOff x="678960" y="1406160"/>
-            <a:chExt cx="4416840" cy="1105200"/>
+            <a:off x="615600" y="1495080"/>
+            <a:ext cx="3279240" cy="927360"/>
+            <a:chOff x="615600" y="1495080"/>
+            <a:chExt cx="3279240" cy="927360"/>
           </a:xfrm>
         </p:grpSpPr>
         <p:grpSp>
           <p:nvGrpSpPr>
-            <p:cNvPr id="62" name="Gruppieren 41"/>
+            <p:cNvPr id="63" name="Gruppieren 1"/>
             <p:cNvGrpSpPr/>
             <p:nvPr/>
           </p:nvGrpSpPr>
           <p:grpSpPr>
             <a:xfrm>
-              <a:off x="1322640" y="1406160"/>
-              <a:ext cx="3773160" cy="1105200"/>
-              <a:chOff x="1322640" y="1406160"/>
-              <a:chExt cx="3773160" cy="1105200"/>
+              <a:off x="1261800" y="1495080"/>
+              <a:ext cx="2633040" cy="927360"/>
+              <a:chOff x="1261800" y="1495080"/>
+              <a:chExt cx="2633040" cy="927360"/>
             </a:xfrm>
           </p:grpSpPr>
           <p:sp>
             <p:nvSpPr>
-              <p:cNvPr id="63" name="Rechteck: abgerundete Ecken 37"/>
+              <p:cNvPr id="64" name="Rechteck: abgerundete Ecken 1"/>
               <p:cNvSpPr/>
               <p:nvPr/>
             </p:nvSpPr>
             <p:spPr>
               <a:xfrm>
-                <a:off x="1322640" y="1406160"/>
-                <a:ext cx="3773160" cy="1105200"/>
+                <a:off x="1261800" y="1495080"/>
+                <a:ext cx="2633040" cy="927360"/>
               </a:xfrm>
               <a:prstGeom prst="roundRect">
                 <a:avLst>
@@ -3524,14 +3881,14 @@
           </p:sp>
           <p:sp>
             <p:nvSpPr>
-              <p:cNvPr id="64" name="Textfeld 38"/>
+              <p:cNvPr id="65" name="Textfeld 1"/>
               <p:cNvSpPr/>
               <p:nvPr/>
             </p:nvSpPr>
             <p:spPr>
               <a:xfrm>
-                <a:off x="1484640" y="1497240"/>
-                <a:ext cx="3449160" cy="912600"/>
+                <a:off x="1356120" y="1635840"/>
+                <a:ext cx="2444400" cy="638280"/>
               </a:xfrm>
               <a:prstGeom prst="rect">
                 <a:avLst/>
@@ -3566,7 +3923,7 @@
                     <a:latin typeface="Calibri"/>
                     <a:ea typeface="DejaVu Sans"/>
                   </a:rPr>
-                  <a:t>Du möchtest herausfinden, wie Informatik deine Forschung verbessern und erleichtern kann?</a:t>
+                  <a:t>Du hast Lust neue Tools auszuprobieren?</a:t>
                 </a:r>
                 <a:endParaRPr b="0" lang="en-US" sz="1800" spc="-1" strike="noStrike">
                   <a:latin typeface="Arial"/>
@@ -3577,91 +3934,106 @@
         </p:grpSp>
         <p:grpSp>
           <p:nvGrpSpPr>
-            <p:cNvPr id="65" name="Gruppieren 34"/>
+            <p:cNvPr id="66" name="Gruppieren 43"/>
             <p:cNvGrpSpPr/>
             <p:nvPr/>
           </p:nvGrpSpPr>
           <p:grpSpPr>
             <a:xfrm>
-              <a:off x="678960" y="1576440"/>
-              <a:ext cx="765000" cy="765000"/>
-              <a:chOff x="678960" y="1576440"/>
-              <a:chExt cx="765000" cy="765000"/>
+              <a:off x="615600" y="1584720"/>
+              <a:ext cx="764640" cy="764640"/>
+              <a:chOff x="615600" y="1584720"/>
+              <a:chExt cx="764640" cy="764640"/>
             </a:xfrm>
           </p:grpSpPr>
-          <p:sp>
-            <p:nvSpPr>
-              <p:cNvPr id="66" name="Ellipse 35"/>
-              <p:cNvSpPr/>
+          <p:grpSp>
+            <p:nvGrpSpPr>
+              <p:cNvPr id="67" name="Gruppieren 34"/>
+              <p:cNvGrpSpPr/>
               <p:nvPr/>
-            </p:nvSpPr>
-            <p:spPr>
+            </p:nvGrpSpPr>
+            <p:grpSpPr>
               <a:xfrm>
-                <a:off x="678960" y="1576440"/>
-                <a:ext cx="765000" cy="765000"/>
+                <a:off x="615600" y="1584720"/>
+                <a:ext cx="764640" cy="764640"/>
+                <a:chOff x="615600" y="1584720"/>
+                <a:chExt cx="764640" cy="764640"/>
               </a:xfrm>
-              <a:prstGeom prst="ellipse">
-                <a:avLst/>
-              </a:prstGeom>
-              <a:solidFill>
-                <a:srgbClr val="57c31f"/>
-              </a:solidFill>
-              <a:ln>
+            </p:grpSpPr>
+            <p:sp>
+              <p:nvSpPr>
+                <p:cNvPr id="68" name="Ellipse 35"/>
+                <p:cNvSpPr/>
+                <p:nvPr/>
+              </p:nvSpPr>
+              <p:spPr>
+                <a:xfrm>
+                  <a:off x="615600" y="1584720"/>
+                  <a:ext cx="764640" cy="764640"/>
+                </a:xfrm>
+                <a:prstGeom prst="ellipse">
+                  <a:avLst/>
+                </a:prstGeom>
                 <a:solidFill>
                   <a:srgbClr val="57c31f"/>
                 </a:solidFill>
-              </a:ln>
-            </p:spPr>
-            <p:style>
-              <a:lnRef idx="2">
-                <a:schemeClr val="accent1">
-                  <a:shade val="15000"/>
-                </a:schemeClr>
-              </a:lnRef>
-              <a:fillRef idx="1">
-                <a:schemeClr val="accent1"/>
-              </a:fillRef>
-              <a:effectRef idx="0">
-                <a:schemeClr val="accent1"/>
-              </a:effectRef>
-              <a:fontRef idx="minor"/>
-            </p:style>
-          </p:sp>
-          <p:pic>
-            <p:nvPicPr>
-              <p:cNvPr id="67" name="Grafik 36" descr="Fragezeichen mit einfarbiger Füllung"/>
-              <p:cNvPicPr/>
-              <p:nvPr/>
-            </p:nvPicPr>
-            <p:blipFill>
-              <a:blip r:embed="rId5"/>
-              <a:stretch/>
-            </p:blipFill>
-            <p:spPr>
-              <a:xfrm>
-                <a:off x="737640" y="1635120"/>
-                <a:ext cx="647280" cy="647280"/>
-              </a:xfrm>
-              <a:prstGeom prst="rect">
-                <a:avLst/>
-              </a:prstGeom>
-              <a:ln w="0">
-                <a:noFill/>
-              </a:ln>
-            </p:spPr>
-          </p:pic>
+                <a:ln>
+                  <a:solidFill>
+                    <a:srgbClr val="57c31f"/>
+                  </a:solidFill>
+                </a:ln>
+              </p:spPr>
+              <p:style>
+                <a:lnRef idx="2">
+                  <a:schemeClr val="accent1">
+                    <a:shade val="15000"/>
+                  </a:schemeClr>
+                </a:lnRef>
+                <a:fillRef idx="1">
+                  <a:schemeClr val="accent1"/>
+                </a:fillRef>
+                <a:effectRef idx="0">
+                  <a:schemeClr val="accent1"/>
+                </a:effectRef>
+                <a:fontRef idx="minor"/>
+              </p:style>
+            </p:sp>
+            <p:pic>
+              <p:nvPicPr>
+                <p:cNvPr id="69" name="Grafik 36" descr="Fragezeichen mit einfarbiger Füllung"/>
+                <p:cNvPicPr/>
+                <p:nvPr/>
+              </p:nvPicPr>
+              <p:blipFill>
+                <a:blip r:embed="rId5"/>
+                <a:stretch/>
+              </p:blipFill>
+              <p:spPr>
+                <a:xfrm>
+                  <a:off x="674280" y="1643400"/>
+                  <a:ext cx="646920" cy="646920"/>
+                </a:xfrm>
+                <a:prstGeom prst="rect">
+                  <a:avLst/>
+                </a:prstGeom>
+                <a:ln w="0">
+                  <a:noFill/>
+                </a:ln>
+              </p:spPr>
+            </p:pic>
+          </p:grpSp>
         </p:grpSp>
       </p:grpSp>
       <p:sp>
         <p:nvSpPr>
-          <p:cNvPr id="68" name="Textfeld 45"/>
+          <p:cNvPr id="70" name="Textfeld 45"/>
           <p:cNvSpPr/>
           <p:nvPr/>
         </p:nvSpPr>
         <p:spPr>
           <a:xfrm>
             <a:off x="1207800" y="12082320"/>
-            <a:ext cx="7184880" cy="455400"/>
+            <a:ext cx="7184520" cy="455400"/>
           </a:xfrm>
           <a:prstGeom prst="rect">
             <a:avLst/>
@@ -3706,7 +4078,7 @@
       </p:sp>
       <p:pic>
         <p:nvPicPr>
-          <p:cNvPr id="69" name="Grafik 47" descr="Puzzleteile mit einfarbiger Füllung"/>
+          <p:cNvPr id="71" name="Grafik 47" descr="Puzzleteile mit einfarbiger Füllung"/>
           <p:cNvPicPr/>
           <p:nvPr/>
         </p:nvPicPr>
@@ -3716,8 +4088,8 @@
         </p:blipFill>
         <p:spPr>
           <a:xfrm rot="486600">
-            <a:off x="1381680" y="5616000"/>
-            <a:ext cx="695520" cy="695520"/>
+            <a:off x="1381680" y="5615640"/>
+            <a:ext cx="695160" cy="695160"/>
           </a:xfrm>
           <a:prstGeom prst="rect">
             <a:avLst/>
@@ -3729,7 +4101,7 @@
       </p:pic>
       <p:pic>
         <p:nvPicPr>
-          <p:cNvPr id="70" name="Grafik 49" descr="Statistiken mit einfarbiger Füllung"/>
+          <p:cNvPr id="72" name="Grafik 49" descr="Statistiken mit einfarbiger Füllung"/>
           <p:cNvPicPr/>
           <p:nvPr/>
         </p:nvPicPr>
@@ -3740,7 +4112,7 @@
         <p:spPr>
           <a:xfrm rot="619200">
             <a:off x="1923120" y="5794560"/>
-            <a:ext cx="654480" cy="654480"/>
+            <a:ext cx="654120" cy="654120"/>
           </a:xfrm>
           <a:prstGeom prst="rect">
             <a:avLst/>
@@ -3752,7 +4124,7 @@
       </p:pic>
       <p:pic>
         <p:nvPicPr>
-          <p:cNvPr id="71" name="" descr=""/>
+          <p:cNvPr id="73" name="" descr=""/>
           <p:cNvPicPr/>
           <p:nvPr/>
         </p:nvPicPr>
@@ -3763,7 +4135,7 @@
         <p:spPr>
           <a:xfrm rot="20061000">
             <a:off x="7696080" y="9183600"/>
-            <a:ext cx="1419840" cy="1419840"/>
+            <a:ext cx="1419480" cy="1419480"/>
           </a:xfrm>
           <a:prstGeom prst="rect">
             <a:avLst/>
@@ -3775,14 +4147,14 @@
       </p:pic>
       <p:sp>
         <p:nvSpPr>
-          <p:cNvPr id="72" name=""/>
+          <p:cNvPr id="74" name=""/>
           <p:cNvSpPr/>
           <p:nvPr/>
         </p:nvSpPr>
         <p:spPr>
           <a:xfrm>
-            <a:off x="6262920" y="12454560"/>
-            <a:ext cx="3337920" cy="346320"/>
+            <a:off x="6262920" y="12418560"/>
+            <a:ext cx="3337560" cy="345960"/>
           </a:xfrm>
           <a:prstGeom prst="rect">
             <a:avLst/>
@@ -3811,7 +4183,11 @@
             </a:pPr>
             <a:r>
               <a:rPr b="0" lang="en-US" sz="1800" spc="-1" strike="noStrike">
+                <a:solidFill>
+                  <a:srgbClr val="000000"/>
+                </a:solidFill>
                 <a:latin typeface="Arial"/>
+                <a:ea typeface="DejaVu Sans"/>
               </a:rPr>
               <a:t>https://go.uniwue.de/hackyhour</a:t>
             </a:r>
@@ -3823,20 +4199,20 @@
       </p:sp>
       <p:sp>
         <p:nvSpPr>
-          <p:cNvPr id="73" name=""/>
+          <p:cNvPr id="75" name=""/>
           <p:cNvSpPr/>
           <p:nvPr/>
         </p:nvSpPr>
         <p:spPr>
           <a:xfrm>
             <a:off x="6845040" y="10640880"/>
-            <a:ext cx="1744560" cy="1685880"/>
+            <a:ext cx="1744200" cy="1685520"/>
           </a:xfrm>
           <a:custGeom>
             <a:avLst/>
             <a:gdLst/>
             <a:ahLst/>
-            <a:rect l="0" t="0" r="r" b="b"/>
+            <a:rect l="l" t="t" r="r" b="b"/>
             <a:pathLst>
               <a:path fill="none" w="4846" h="4683">
                 <a:moveTo>
@@ -3850,6 +4226,7 @@
               </a:path>
             </a:pathLst>
           </a:custGeom>
+          <a:noFill/>
           <a:ln w="73080">
             <a:solidFill>
               <a:srgbClr val="57c31f"/>
@@ -3858,45 +4235,51 @@
             <a:tailEnd len="med" type="triangle" w="med"/>
           </a:ln>
         </p:spPr>
+        <p:style>
+          <a:lnRef idx="0"/>
+          <a:fillRef idx="0"/>
+          <a:effectRef idx="0"/>
+          <a:fontRef idx="minor"/>
+        </p:style>
       </p:sp>
       <p:grpSp>
         <p:nvGrpSpPr>
-          <p:cNvPr id="74" name=""/>
+          <p:cNvPr id="76" name=""/>
           <p:cNvGrpSpPr/>
           <p:nvPr/>
         </p:nvGrpSpPr>
         <p:grpSpPr>
           <a:xfrm>
             <a:off x="56520" y="2700360"/>
-            <a:ext cx="2621520" cy="927720"/>
+            <a:ext cx="2621160" cy="927360"/>
             <a:chOff x="56520" y="2700360"/>
-            <a:chExt cx="2621520" cy="927720"/>
+            <a:chExt cx="2621160" cy="927360"/>
           </a:xfrm>
         </p:grpSpPr>
         <p:grpSp>
           <p:nvGrpSpPr>
-            <p:cNvPr id="75" name="Gruppieren 5"/>
+            <p:cNvPr id="77" name="Gruppieren 5"/>
             <p:cNvGrpSpPr/>
             <p:nvPr/>
           </p:nvGrpSpPr>
           <p:grpSpPr>
             <a:xfrm>
               <a:off x="700200" y="2700360"/>
-              <a:ext cx="1977840" cy="927720"/>
+              <a:ext cx="1977480" cy="927360"/>
               <a:chOff x="700200" y="2700360"/>
-              <a:chExt cx="1977840" cy="927720"/>
+              <a:chExt cx="1977480" cy="927360"/>
             </a:xfrm>
           </p:grpSpPr>
           <p:sp>
             <p:nvSpPr>
-              <p:cNvPr id="76" name="Rechteck: abgerundete Ecken 2"/>
+              <p:cNvPr id="78" name="Rechteck: abgerundete Ecken 2"/>
               <p:cNvSpPr/>
               <p:nvPr/>
             </p:nvSpPr>
             <p:spPr>
               <a:xfrm>
                 <a:off x="700200" y="2700360"/>
-                <a:ext cx="1977840" cy="927720"/>
+                <a:ext cx="1977480" cy="927360"/>
               </a:xfrm>
               <a:prstGeom prst="roundRect">
                 <a:avLst>
@@ -3927,14 +4310,14 @@
           </p:sp>
           <p:sp>
             <p:nvSpPr>
-              <p:cNvPr id="77" name="Textfeld 2"/>
+              <p:cNvPr id="79" name="Textfeld 2"/>
               <p:cNvSpPr/>
               <p:nvPr/>
             </p:nvSpPr>
             <p:spPr>
               <a:xfrm>
                 <a:off x="771120" y="2841120"/>
-                <a:ext cx="1836000" cy="638280"/>
+                <a:ext cx="1835640" cy="638280"/>
               </a:xfrm>
               <a:prstGeom prst="rect">
                 <a:avLst/>
@@ -3969,17 +4352,7 @@
                     <a:latin typeface="Calibri"/>
                     <a:ea typeface="DejaVu Sans"/>
                   </a:rPr>
-                  <a:t>Du hast Fragen zu </a:t>
-                </a:r>
-                <a:r>
-                  <a:rPr b="0" lang="de-DE" sz="1800" spc="-1" strike="noStrike">
-                    <a:solidFill>
-                      <a:srgbClr val="000000"/>
-                    </a:solidFill>
-                    <a:latin typeface="Calibri"/>
-                    <a:ea typeface="DejaVu Sans"/>
-                  </a:rPr>
-                  <a:t>deinem Projekt?</a:t>
+                  <a:t>Du hast Fragen zu deinem Projekt?</a:t>
                 </a:r>
                 <a:endParaRPr b="0" lang="en-US" sz="1800" spc="-1" strike="noStrike">
                   <a:latin typeface="Arial"/>
@@ -3990,28 +4363,28 @@
         </p:grpSp>
         <p:grpSp>
           <p:nvGrpSpPr>
-            <p:cNvPr id="78" name="Gruppieren 6"/>
+            <p:cNvPr id="80" name="Gruppieren 6"/>
             <p:cNvGrpSpPr/>
             <p:nvPr/>
           </p:nvGrpSpPr>
           <p:grpSpPr>
             <a:xfrm>
               <a:off x="56520" y="2781720"/>
-              <a:ext cx="765000" cy="765000"/>
+              <a:ext cx="764640" cy="764640"/>
               <a:chOff x="56520" y="2781720"/>
-              <a:chExt cx="765000" cy="765000"/>
+              <a:chExt cx="764640" cy="764640"/>
             </a:xfrm>
           </p:grpSpPr>
           <p:sp>
             <p:nvSpPr>
-              <p:cNvPr id="79" name="Ellipse 2"/>
+              <p:cNvPr id="81" name="Ellipse 2"/>
               <p:cNvSpPr/>
               <p:nvPr/>
             </p:nvSpPr>
             <p:spPr>
               <a:xfrm>
                 <a:off x="56520" y="2781720"/>
-                <a:ext cx="765000" cy="765000"/>
+                <a:ext cx="764640" cy="764640"/>
               </a:xfrm>
               <a:prstGeom prst="ellipse">
                 <a:avLst/>
@@ -4042,7 +4415,7 @@
           </p:sp>
           <p:pic>
             <p:nvPicPr>
-              <p:cNvPr id="80" name="Grafik 2" descr="Fragezeichen mit einfarbiger Füllung"/>
+              <p:cNvPr id="82" name="Grafik 2" descr="Fragezeichen mit einfarbiger Füllung"/>
               <p:cNvPicPr/>
               <p:nvPr/>
             </p:nvPicPr>
@@ -4053,7 +4426,7 @@
             <p:spPr>
               <a:xfrm>
                 <a:off x="115200" y="2840400"/>
-                <a:ext cx="647280" cy="647280"/>
+                <a:ext cx="646920" cy="646920"/>
               </a:xfrm>
               <a:prstGeom prst="rect">
                 <a:avLst/>
